--- a/slide/themes/src/36_wild nature.pptx
+++ b/slide/themes/src/36_wild nature.pptx
@@ -6528,67 +6528,31 @@
           </a:bodyPr>
           <a:lstStyle>
             <a:lvl1pPr>
-              <a:defRPr b="1">
-                <a:latin typeface="Verdana"/>
-                <a:ea typeface="Verdana"/>
-                <a:cs typeface="Verdana"/>
-              </a:defRPr>
+              <a:defRPr b="1"/>
             </a:lvl1pPr>
             <a:lvl2pPr>
-              <a:defRPr b="1">
-                <a:latin typeface="Verdana"/>
-                <a:ea typeface="Verdana"/>
-                <a:cs typeface="Verdana"/>
-              </a:defRPr>
+              <a:defRPr b="1"/>
             </a:lvl2pPr>
             <a:lvl3pPr>
-              <a:defRPr b="1">
-                <a:latin typeface="Verdana"/>
-                <a:ea typeface="Verdana"/>
-                <a:cs typeface="Verdana"/>
-              </a:defRPr>
+              <a:defRPr b="1"/>
             </a:lvl3pPr>
             <a:lvl4pPr>
-              <a:defRPr b="1">
-                <a:latin typeface="Verdana"/>
-                <a:ea typeface="Verdana"/>
-                <a:cs typeface="Verdana"/>
-              </a:defRPr>
+              <a:defRPr b="1"/>
             </a:lvl4pPr>
             <a:lvl5pPr>
-              <a:defRPr b="1">
-                <a:latin typeface="Verdana"/>
-                <a:ea typeface="Verdana"/>
-                <a:cs typeface="Verdana"/>
-              </a:defRPr>
+              <a:defRPr b="1"/>
             </a:lvl5pPr>
             <a:lvl6pPr>
-              <a:defRPr b="1">
-                <a:latin typeface="Verdana"/>
-                <a:ea typeface="Verdana"/>
-                <a:cs typeface="Verdana"/>
-              </a:defRPr>
+              <a:defRPr b="1"/>
             </a:lvl6pPr>
             <a:lvl7pPr>
-              <a:defRPr b="1">
-                <a:latin typeface="Verdana"/>
-                <a:ea typeface="Verdana"/>
-                <a:cs typeface="Verdana"/>
-              </a:defRPr>
+              <a:defRPr b="1"/>
             </a:lvl7pPr>
             <a:lvl8pPr>
-              <a:defRPr b="1">
-                <a:latin typeface="Verdana"/>
-                <a:ea typeface="Verdana"/>
-                <a:cs typeface="Verdana"/>
-              </a:defRPr>
+              <a:defRPr b="1"/>
             </a:lvl8pPr>
             <a:lvl9pPr>
-              <a:defRPr b="1">
-                <a:latin typeface="Verdana"/>
-                <a:ea typeface="Verdana"/>
-                <a:cs typeface="Verdana"/>
-              </a:defRPr>
+              <a:defRPr b="1"/>
             </a:lvl9pPr>
           </a:lstStyle>
           <a:p>
@@ -6636,9 +6600,6 @@
                     <a:lumOff val="25000"/>
                   </a:schemeClr>
                 </a:solidFill>
-                <a:latin typeface="Verdana"/>
-                <a:ea typeface="Verdana"/>
-                <a:cs typeface="Verdana"/>
               </a:defRPr>
             </a:lvl1pPr>
             <a:lvl2pPr>
@@ -6650,9 +6611,6 @@
                     <a:lumOff val="25000"/>
                   </a:schemeClr>
                 </a:solidFill>
-                <a:latin typeface="Verdana"/>
-                <a:ea typeface="Verdana"/>
-                <a:cs typeface="Verdana"/>
               </a:defRPr>
             </a:lvl2pPr>
             <a:lvl3pPr>
@@ -6664,9 +6622,6 @@
                     <a:lumOff val="25000"/>
                   </a:schemeClr>
                 </a:solidFill>
-                <a:latin typeface="Verdana"/>
-                <a:ea typeface="Verdana"/>
-                <a:cs typeface="Verdana"/>
               </a:defRPr>
             </a:lvl3pPr>
             <a:lvl4pPr>
@@ -6678,9 +6633,6 @@
                     <a:lumOff val="25000"/>
                   </a:schemeClr>
                 </a:solidFill>
-                <a:latin typeface="Verdana"/>
-                <a:ea typeface="Verdana"/>
-                <a:cs typeface="Verdana"/>
               </a:defRPr>
             </a:lvl4pPr>
             <a:lvl5pPr>
@@ -6692,9 +6644,6 @@
                     <a:lumOff val="25000"/>
                   </a:schemeClr>
                 </a:solidFill>
-                <a:latin typeface="Verdana"/>
-                <a:ea typeface="Verdana"/>
-                <a:cs typeface="Verdana"/>
               </a:defRPr>
             </a:lvl5pPr>
             <a:lvl6pPr>
@@ -6706,9 +6655,6 @@
                     <a:lumOff val="25000"/>
                   </a:schemeClr>
                 </a:solidFill>
-                <a:latin typeface="Verdana"/>
-                <a:ea typeface="Verdana"/>
-                <a:cs typeface="Verdana"/>
               </a:defRPr>
             </a:lvl6pPr>
             <a:lvl7pPr>
@@ -6720,9 +6666,6 @@
                     <a:lumOff val="25000"/>
                   </a:schemeClr>
                 </a:solidFill>
-                <a:latin typeface="Verdana"/>
-                <a:ea typeface="Verdana"/>
-                <a:cs typeface="Verdana"/>
               </a:defRPr>
             </a:lvl7pPr>
             <a:lvl8pPr>
@@ -6734,9 +6677,6 @@
                     <a:lumOff val="25000"/>
                   </a:schemeClr>
                 </a:solidFill>
-                <a:latin typeface="Verdana"/>
-                <a:ea typeface="Verdana"/>
-                <a:cs typeface="Verdana"/>
               </a:defRPr>
             </a:lvl8pPr>
             <a:lvl9pPr>
@@ -6748,9 +6688,6 @@
                     <a:lumOff val="25000"/>
                   </a:schemeClr>
                 </a:solidFill>
-                <a:latin typeface="Verdana"/>
-                <a:ea typeface="Verdana"/>
-                <a:cs typeface="Verdana"/>
               </a:defRPr>
             </a:lvl9pPr>
           </a:lstStyle>
@@ -7355,14 +7292,14 @@
     </a:clrScheme>
     <a:fontScheme name="Office Theme">
       <a:majorFont>
-        <a:latin typeface="Arial"/>
-        <a:ea typeface="SimSun"/>
-        <a:cs typeface="Arial"/>
+        <a:latin typeface="Verdana"/>
+        <a:ea typeface="Microsoft YaHei"/>
+        <a:cs typeface="Tahoma"/>
       </a:majorFont>
       <a:minorFont>
-        <a:latin typeface="Arial"/>
-        <a:ea typeface="SimSun"/>
-        <a:cs typeface="Arial"/>
+        <a:latin typeface="Verdana"/>
+        <a:ea typeface="Microsoft YaHei"/>
+        <a:cs typeface="Tahoma"/>
       </a:minorFont>
     </a:fontScheme>
     <a:fmtScheme name="Office Theme">
@@ -7592,14 +7529,14 @@
     </a:clrScheme>
     <a:fontScheme name="Arial">
       <a:majorFont>
-        <a:latin typeface="Arial"/>
-        <a:ea typeface="Arial"/>
-        <a:cs typeface="Arial"/>
+        <a:latin typeface="Verdana"/>
+        <a:ea typeface="Microsoft YaHei"/>
+        <a:cs typeface="Tahoma"/>
       </a:majorFont>
       <a:minorFont>
-        <a:latin typeface="Arial"/>
-        <a:ea typeface="Arial"/>
-        <a:cs typeface="Arial"/>
+        <a:latin typeface="Verdana"/>
+        <a:ea typeface="Microsoft YaHei"/>
+        <a:cs typeface="Tahoma"/>
       </a:minorFont>
     </a:fontScheme>
     <a:fmtScheme name="Office">

--- a/slide/themes/src/36_wild nature.pptx
+++ b/slide/themes/src/36_wild nature.pptx
@@ -536,10 +536,7 @@
             <a:pPr>
               <a:defRPr/>
             </a:pPr>
-            <a:endParaRPr lang="en-US">
-              <a:latin typeface="Arial"/>
-              <a:cs typeface="Arial"/>
-            </a:endParaRPr>
+            <a:endParaRPr lang="en-US"/>
           </a:p>
         </p:txBody>
       </p:sp>
